--- a/scenarios/S03_sap_fi_consolidation/deliverables/FI_대사효율화_개선안_덱.pptx
+++ b/scenarios/S03_sap_fi_consolidation/deliverables/FI_대사효율화_개선안_덱.pptx
@@ -13,6 +13,12 @@
     <p:sldId id="261" r:id="rId12"/>
     <p:sldId id="262" r:id="rId13"/>
     <p:sldId id="263" r:id="rId14"/>
+    <p:sldId id="264" r:id="rId15"/>
+    <p:sldId id="265" r:id="rId16"/>
+    <p:sldId id="266" r:id="rId17"/>
+    <p:sldId id="267" r:id="rId18"/>
+    <p:sldId id="268" r:id="rId19"/>
+    <p:sldId id="269" r:id="rId20"/>
   </p:sldIdLst>
   <p:sldSz cx="9144000" cy="6858000" type="screen4x3"/>
   <p:notesSz cx="6858000" cy="9144000"/>
@@ -3145,6 +3151,426 @@
 </p:sld>
 </file>
 
+<file path=ppt/slides/slide10.xml><?xml version="1.0" encoding="utf-8"?>
+<p:sld xmlns:a="http://schemas.openxmlformats.org/drawingml/2006/main" xmlns:p="http://schemas.openxmlformats.org/presentationml/2006/main" xmlns:r="http://schemas.openxmlformats.org/officeDocument/2006/relationships">
+  <p:cSld>
+    <p:spTree>
+      <p:nvGrpSpPr>
+        <p:cNvPr id="1" name=""/>
+        <p:cNvGrpSpPr/>
+        <p:nvPr/>
+      </p:nvGrpSpPr>
+      <p:grpSpPr/>
+      <p:sp>
+        <p:nvSpPr>
+          <p:cNvPr id="2" name="Title 1"/>
+          <p:cNvSpPr>
+            <a:spLocks noGrp="1"/>
+          </p:cNvSpPr>
+          <p:nvPr>
+            <p:ph type="title"/>
+          </p:nvPr>
+        </p:nvSpPr>
+        <p:spPr/>
+        <p:txBody>
+          <a:bodyPr/>
+          <a:lstStyle/>
+          <a:p>
+            <a:r>
+              <a:t>변경 승인 및 후속 검증 기준</a:t>
+            </a:r>
+          </a:p>
+        </p:txBody>
+      </p:sp>
+      <p:sp>
+        <p:nvSpPr>
+          <p:cNvPr id="3" name="Content Placeholder 2"/>
+          <p:cNvSpPr>
+            <a:spLocks noGrp="1"/>
+          </p:cNvSpPr>
+          <p:nvPr>
+            <p:ph idx="1"/>
+          </p:nvPr>
+        </p:nvSpPr>
+        <p:spPr/>
+        <p:txBody>
+          <a:bodyPr/>
+          <a:lstStyle/>
+          <a:p>
+            <a:r>
+              <a:t>내부거래대사 키를 표준 매핑 구조로 통합하고 매핑 버전·변경 이력·기준 시점·기존 결산 결과 호환성과 재현성을 관리</a:t>
+            </a:r>
+          </a:p>
+          <a:p>
+            <a:pPr>
+              <a:defRPr sz="1400"/>
+            </a:pPr>
+            <a:r>
+              <a:t>결산리포트에 대사 대상·매핑 키·상태·불일치 사유·조치 상태 및 미대사·불일치 중심 조회와 상세 drill-down 반영</a:t>
+            </a:r>
+          </a:p>
+          <a:p>
+            <a:pPr>
+              <a:defRPr sz="1400"/>
+            </a:pPr>
+            <a:r>
+              <a:t>정상·미매핑·중복·이력 변경·대량 조회·호환성·시점별 재현성 테스트와 권한·감사로그·인터페이스·성능·마이그레이션·롤백 기준을 후속 확정 및 검증</a:t>
+            </a:r>
+          </a:p>
+        </p:txBody>
+      </p:sp>
+    </p:spTree>
+  </p:cSld>
+  <p:clrMapOvr>
+    <a:masterClrMapping/>
+  </p:clrMapOvr>
+</p:sld>
+</file>
+
+<file path=ppt/slides/slide11.xml><?xml version="1.0" encoding="utf-8"?>
+<p:sld xmlns:a="http://schemas.openxmlformats.org/drawingml/2006/main" xmlns:p="http://schemas.openxmlformats.org/presentationml/2006/main" xmlns:r="http://schemas.openxmlformats.org/officeDocument/2006/relationships">
+  <p:cSld>
+    <p:spTree>
+      <p:nvGrpSpPr>
+        <p:cNvPr id="1" name=""/>
+        <p:cNvGrpSpPr/>
+        <p:nvPr/>
+      </p:nvGrpSpPr>
+      <p:grpSpPr/>
+      <p:sp>
+        <p:nvSpPr>
+          <p:cNvPr id="2" name="Title 1"/>
+          <p:cNvSpPr>
+            <a:spLocks noGrp="1"/>
+          </p:cNvSpPr>
+          <p:nvPr>
+            <p:ph type="title"/>
+          </p:nvPr>
+        </p:nvSpPr>
+        <p:spPr/>
+        <p:txBody>
+          <a:bodyPr/>
+          <a:lstStyle/>
+          <a:p>
+            <a:r>
+              <a:t>변경 이력: 표준 키 매핑 및 결산리포트 개선</a:t>
+            </a:r>
+          </a:p>
+        </p:txBody>
+      </p:sp>
+      <p:sp>
+        <p:nvSpPr>
+          <p:cNvPr id="3" name="Content Placeholder 2"/>
+          <p:cNvSpPr>
+            <a:spLocks noGrp="1"/>
+          </p:cNvSpPr>
+          <p:nvPr>
+            <p:ph idx="1"/>
+          </p:nvPr>
+        </p:nvSpPr>
+        <p:spPr/>
+        <p:txBody>
+          <a:bodyPr/>
+          <a:lstStyle/>
+          <a:p>
+            <a:r>
+              <a:t>내부거래대사 키를 표준 매핑 구조로 통합하고 생성·변경·조회·유효기간·상태 및 이력 관리 기준을 반영</a:t>
+            </a:r>
+          </a:p>
+          <a:p>
+            <a:pPr>
+              <a:defRPr sz="1400"/>
+            </a:pPr>
+            <a:r>
+              <a:t>결산 데이터 호환성과 과거 결과 재현성 관리 기준을 반영</a:t>
+            </a:r>
+          </a:p>
+          <a:p>
+            <a:pPr>
+              <a:defRPr sz="1400"/>
+            </a:pPr>
+            <a:r>
+              <a:t>대사 대상·매핑 키·대사 상태·불일치 사유·조치 상태 조회와 미대사·불일치 필터 및 drill-down을 추가</a:t>
+            </a:r>
+          </a:p>
+          <a:p>
+            <a:pPr>
+              <a:defRPr sz="1400"/>
+            </a:pPr>
+            <a:r>
+              <a:t>정상·미매핑·중복·변경 이력·대량 조회·호환성·재현성 테스트를 추가</a:t>
+            </a:r>
+          </a:p>
+          <a:p>
+            <a:pPr>
+              <a:defRPr sz="1400"/>
+            </a:pPr>
+            <a:r>
+              <a:t>권한·감사·성능·마이그레이션·롤백 기준은 후속 확정 사항으로 추적</a:t>
+            </a:r>
+          </a:p>
+        </p:txBody>
+      </p:sp>
+    </p:spTree>
+  </p:cSld>
+  <p:clrMapOvr>
+    <a:masterClrMapping/>
+  </p:clrMapOvr>
+</p:sld>
+</file>
+
+<file path=ppt/slides/slide12.xml><?xml version="1.0" encoding="utf-8"?>
+<p:sld xmlns:a="http://schemas.openxmlformats.org/drawingml/2006/main" xmlns:p="http://schemas.openxmlformats.org/presentationml/2006/main" xmlns:r="http://schemas.openxmlformats.org/officeDocument/2006/relationships">
+  <p:cSld>
+    <p:spTree>
+      <p:nvGrpSpPr>
+        <p:cNvPr id="1" name=""/>
+        <p:cNvGrpSpPr/>
+        <p:nvPr/>
+      </p:nvGrpSpPr>
+      <p:grpSpPr/>
+      <p:sp>
+        <p:nvSpPr>
+          <p:cNvPr id="2" name="Title 1"/>
+          <p:cNvSpPr>
+            <a:spLocks noGrp="1"/>
+          </p:cNvSpPr>
+          <p:nvPr>
+            <p:ph type="title"/>
+          </p:nvPr>
+        </p:nvSpPr>
+        <p:spPr/>
+        <p:txBody>
+          <a:bodyPr/>
+          <a:lstStyle/>
+          <a:p>
+            <a:r>
+              <a:t>변경 이력: 내부거래대사 키 표준화 및 리포트 개선</a:t>
+            </a:r>
+          </a:p>
+        </p:txBody>
+      </p:sp>
+      <p:sp>
+        <p:nvSpPr>
+          <p:cNvPr id="3" name="Content Placeholder 2"/>
+          <p:cNvSpPr>
+            <a:spLocks noGrp="1"/>
+          </p:cNvSpPr>
+          <p:nvPr>
+            <p:ph idx="1"/>
+          </p:nvPr>
+        </p:nvSpPr>
+        <p:spPr/>
+        <p:txBody>
+          <a:bodyPr/>
+          <a:lstStyle/>
+          <a:p>
+            <a:r>
+              <a:t>표준 매핑 구조에 키 생성·수정·조회·유효기간·상태 관리와 매핑 이력을 통합</a:t>
+            </a:r>
+          </a:p>
+          <a:p>
+            <a:pPr>
+              <a:defRPr sz="1400"/>
+            </a:pPr>
+            <a:r>
+              <a:t>미매핑·중복 매핑·호환성·시점별 재현성·마이그레이션 검증 기준 반영</a:t>
+            </a:r>
+          </a:p>
+          <a:p>
+            <a:pPr>
+              <a:defRPr sz="1400"/>
+            </a:pPr>
+            <a:r>
+              <a:t>결산리포트에 대사 대상·매핑 키·상태·불일치 사유·조치 상태 및 drill-down 조회 반영</a:t>
+            </a:r>
+          </a:p>
+          <a:p>
+            <a:pPr>
+              <a:defRPr sz="1400"/>
+            </a:pPr>
+            <a:r>
+              <a:t>미착상품 계정 불일치 12건과 환율차이 기인 7건을 포함한 총 19건을 주요 검증 데이터로 관리</a:t>
+            </a:r>
+          </a:p>
+        </p:txBody>
+      </p:sp>
+    </p:spTree>
+  </p:cSld>
+  <p:clrMapOvr>
+    <a:masterClrMapping/>
+  </p:clrMapOvr>
+</p:sld>
+</file>
+
+<file path=ppt/slides/slide13.xml><?xml version="1.0" encoding="utf-8"?>
+<p:sld xmlns:a="http://schemas.openxmlformats.org/drawingml/2006/main" xmlns:p="http://schemas.openxmlformats.org/presentationml/2006/main" xmlns:r="http://schemas.openxmlformats.org/officeDocument/2006/relationships">
+  <p:cSld>
+    <p:spTree>
+      <p:nvGrpSpPr>
+        <p:cNvPr id="1" name=""/>
+        <p:cNvGrpSpPr/>
+        <p:nvPr/>
+      </p:nvGrpSpPr>
+      <p:grpSpPr/>
+      <p:sp>
+        <p:nvSpPr>
+          <p:cNvPr id="2" name="Title 1"/>
+          <p:cNvSpPr>
+            <a:spLocks noGrp="1"/>
+          </p:cNvSpPr>
+          <p:nvPr>
+            <p:ph type="title"/>
+          </p:nvPr>
+        </p:nvSpPr>
+        <p:spPr/>
+        <p:txBody>
+          <a:bodyPr/>
+          <a:lstStyle/>
+          <a:p>
+            <a:r>
+              <a:t>변경 이력 - 표준 키 매핑 및 결산리포트 개선</a:t>
+            </a:r>
+          </a:p>
+        </p:txBody>
+      </p:sp>
+      <p:sp>
+        <p:nvSpPr>
+          <p:cNvPr id="3" name="Content Placeholder 2"/>
+          <p:cNvSpPr>
+            <a:spLocks noGrp="1"/>
+          </p:cNvSpPr>
+          <p:nvPr>
+            <p:ph idx="1"/>
+          </p:nvPr>
+        </p:nvSpPr>
+        <p:spPr/>
+        <p:txBody>
+          <a:bodyPr/>
+          <a:lstStyle/>
+          <a:p>
+            <a:r>
+              <a:t>표준 내부거래대사 키와 생성·수정·조회·유효기간·상태 관리 기준을 통합</a:t>
+            </a:r>
+          </a:p>
+          <a:p>
+            <a:pPr>
+              <a:defRPr sz="1400"/>
+            </a:pPr>
+            <a:r>
+              <a:t>파트너사 코드 미매핑 주요 불일치 19건(미착상품 12건, 환율차이 7건)을 검증 대상으로 관리</a:t>
+            </a:r>
+          </a:p>
+          <a:p>
+            <a:pPr>
+              <a:defRPr sz="1400"/>
+            </a:pPr>
+            <a:r>
+              <a:t>미매핑·중복 매핑·변경 이력·호환성·재현성·권한·감사로그·마이그레이션·롤백 기준 반영</a:t>
+            </a:r>
+          </a:p>
+          <a:p>
+            <a:pPr>
+              <a:defRPr sz="1400"/>
+            </a:pPr>
+            <a:r>
+              <a:t>결산리포트 통합 조회, 필터·정렬·상세 drill-down 및 미대사·불일치 중심 조회 제공</a:t>
+            </a:r>
+          </a:p>
+        </p:txBody>
+      </p:sp>
+    </p:spTree>
+  </p:cSld>
+  <p:clrMapOvr>
+    <a:masterClrMapping/>
+  </p:clrMapOvr>
+</p:sld>
+</file>
+
+<file path=ppt/slides/slide14.xml><?xml version="1.0" encoding="utf-8"?>
+<p:sld xmlns:a="http://schemas.openxmlformats.org/drawingml/2006/main" xmlns:p="http://schemas.openxmlformats.org/presentationml/2006/main" xmlns:r="http://schemas.openxmlformats.org/officeDocument/2006/relationships">
+  <p:cSld>
+    <p:spTree>
+      <p:nvGrpSpPr>
+        <p:cNvPr id="1" name=""/>
+        <p:cNvGrpSpPr/>
+        <p:nvPr/>
+      </p:nvGrpSpPr>
+      <p:grpSpPr/>
+      <p:sp>
+        <p:nvSpPr>
+          <p:cNvPr id="2" name="Title 1"/>
+          <p:cNvSpPr>
+            <a:spLocks noGrp="1"/>
+          </p:cNvSpPr>
+          <p:nvPr>
+            <p:ph type="title"/>
+          </p:nvPr>
+        </p:nvSpPr>
+        <p:spPr/>
+        <p:txBody>
+          <a:bodyPr/>
+          <a:lstStyle/>
+          <a:p>
+            <a:r>
+              <a:t>변경 승인 반영: 표준 키 매핑 및 결산리포트 조회 개선</a:t>
+            </a:r>
+          </a:p>
+        </p:txBody>
+      </p:sp>
+      <p:sp>
+        <p:nvSpPr>
+          <p:cNvPr id="3" name="Content Placeholder 2"/>
+          <p:cNvSpPr>
+            <a:spLocks noGrp="1"/>
+          </p:cNvSpPr>
+          <p:nvPr>
+            <p:ph idx="1"/>
+          </p:nvPr>
+        </p:nvSpPr>
+        <p:spPr/>
+        <p:txBody>
+          <a:bodyPr/>
+          <a:lstStyle/>
+          <a:p>
+            <a:r>
+              <a:t>내부거래대사 키를 표준 매핑 구조로 통합하고 생성·수정·조회·유효기간·상태·이력 기준을 정의</a:t>
+            </a:r>
+          </a:p>
+          <a:p>
+            <a:pPr>
+              <a:defRPr sz="1400"/>
+            </a:pPr>
+            <a:r>
+              <a:t>대사 대상·매핑 키·대사 상태·불일치 사유·조치 상태를 한 화면에서 조회</a:t>
+            </a:r>
+          </a:p>
+          <a:p>
+            <a:pPr>
+              <a:defRPr sz="1400"/>
+            </a:pPr>
+            <a:r>
+              <a:t>조회·필터·정렬·상세 drill-down 및 미대사·불일치 중심 조회 반영</a:t>
+            </a:r>
+          </a:p>
+          <a:p>
+            <a:pPr>
+              <a:defRPr sz="1400"/>
+            </a:pPr>
+            <a:r>
+              <a:t>기존 결산 결과 재현성, 권한통제, cross-module 영향, 성능, 마이그레이션·롤백 기준을 추적 및 테스트에 반영</a:t>
+            </a:r>
+          </a:p>
+        </p:txBody>
+      </p:sp>
+    </p:spTree>
+  </p:cSld>
+  <p:clrMapOvr>
+    <a:masterClrMapping/>
+  </p:clrMapOvr>
+</p:sld>
+</file>
+
 <file path=ppt/slides/slide2.xml><?xml version="1.0" encoding="utf-8"?>
 <p:sld xmlns:a="http://schemas.openxmlformats.org/drawingml/2006/main" xmlns:p="http://schemas.openxmlformats.org/presentationml/2006/main" xmlns:r="http://schemas.openxmlformats.org/officeDocument/2006/relationships">
   <p:cSld>
@@ -3347,7 +3773,7 @@
           <a:lstStyle/>
           <a:p>
             <a:r>
-              <a:t>표준 대사키 정의</a:t>
+              <a:t>표준 대사키 및 매핑 버전·기준 시점 정의, 변경 이력·유효기간·상태 관리</a:t>
             </a:r>
           </a:p>
           <a:p>
@@ -3417,7 +3843,7 @@
           <a:lstStyle/>
           <a:p>
             <a:r>
-              <a:t>표준키 기준 자동매칭</a:t>
+              <a:t>표준키 기준 자동매칭 및 대사 대상·매핑 키·대사 상태·불일치 사유·조치 상태 통합 조회</a:t>
             </a:r>
           </a:p>
           <a:p>
@@ -3638,6 +4064,98 @@
           <a:p>
             <a:r>
               <a:t>예외 처리 절차 고도화</a:t>
+            </a:r>
+          </a:p>
+        </p:txBody>
+      </p:sp>
+    </p:spTree>
+  </p:cSld>
+  <p:clrMapOvr>
+    <a:masterClrMapping/>
+  </p:clrMapOvr>
+</p:sld>
+</file>
+
+<file path=ppt/slides/slide9.xml><?xml version="1.0" encoding="utf-8"?>
+<p:sld xmlns:a="http://schemas.openxmlformats.org/drawingml/2006/main" xmlns:p="http://schemas.openxmlformats.org/presentationml/2006/main" xmlns:r="http://schemas.openxmlformats.org/officeDocument/2006/relationships">
+  <p:cSld>
+    <p:spTree>
+      <p:nvGrpSpPr>
+        <p:cNvPr id="1" name=""/>
+        <p:cNvGrpSpPr/>
+        <p:nvPr/>
+      </p:nvGrpSpPr>
+      <p:grpSpPr/>
+      <p:sp>
+        <p:nvSpPr>
+          <p:cNvPr id="2" name="Title 1"/>
+          <p:cNvSpPr>
+            <a:spLocks noGrp="1"/>
+          </p:cNvSpPr>
+          <p:nvPr>
+            <p:ph type="title"/>
+          </p:nvPr>
+        </p:nvSpPr>
+        <p:spPr/>
+        <p:txBody>
+          <a:bodyPr/>
+          <a:lstStyle/>
+          <a:p>
+            <a:r>
+              <a:t>변경 승인: 내부거래대사 키 매핑 및 리포트 조회 개선</a:t>
+            </a:r>
+          </a:p>
+        </p:txBody>
+      </p:sp>
+      <p:sp>
+        <p:nvSpPr>
+          <p:cNvPr id="3" name="Content Placeholder 2"/>
+          <p:cNvSpPr>
+            <a:spLocks noGrp="1"/>
+          </p:cNvSpPr>
+          <p:nvPr>
+            <p:ph idx="1"/>
+          </p:nvPr>
+        </p:nvSpPr>
+        <p:spPr/>
+        <p:txBody>
+          <a:bodyPr/>
+          <a:lstStyle/>
+          <a:p>
+            <a:r>
+              <a:t>표준 매핑 구조와 키 생성·수정·조회·유효기간·상태·이력 관리 반영</a:t>
+            </a:r>
+          </a:p>
+          <a:p>
+            <a:pPr>
+              <a:defRPr sz="1400"/>
+            </a:pPr>
+            <a:r>
+              <a:t>기존 결산 결과 호환성과 매핑 변경 영향 관리 반영</a:t>
+            </a:r>
+          </a:p>
+          <a:p>
+            <a:pPr>
+              <a:defRPr sz="1400"/>
+            </a:pPr>
+            <a:r>
+              <a:t>대사 대상·매핑 키·상태·불일치 사유·조치 상태의 통합 조회 및 상세 drill-down 반영</a:t>
+            </a:r>
+          </a:p>
+          <a:p>
+            <a:pPr>
+              <a:defRPr sz="1400"/>
+            </a:pPr>
+            <a:r>
+              <a:t>미매핑·중복 매핑·변경 이력·대량 조회·호환성 테스트 시나리오 추가</a:t>
+            </a:r>
+          </a:p>
+          <a:p>
+            <a:pPr>
+              <a:defRPr sz="1400"/>
+            </a:pPr>
+            <a:r>
+              <a:t>권한·감사통제·이력 재현성·마이그레이션·운영 성능 기준은 후속 관리</a:t>
             </a:r>
           </a:p>
         </p:txBody>
